--- a/projektmunka.pptx
+++ b/projektmunka.pptx
@@ -111,6 +111,11 @@
       </a:defRPr>
     </a:lvl9pPr>
   </p:defaultTextStyle>
+  <p:extLst>
+    <p:ext uri="{EFAFB233-063F-42B5-8137-9DF3F51BA10A}">
+      <p15:sldGuideLst xmlns:p15="http://schemas.microsoft.com/office/powerpoint/2012/main"/>
+    </p:ext>
+  </p:extLst>
 </p:presentation>
 </file>
 
@@ -6118,7 +6123,9 @@
         </p:nvSpPr>
         <p:spPr/>
         <p:txBody>
-          <a:bodyPr/>
+          <a:bodyPr>
+            <a:normAutofit/>
+          </a:bodyPr>
           <a:lstStyle/>
           <a:p>
             <a:r>
@@ -6151,8 +6158,13 @@
           <a:p>
             <a:r>
               <a:rPr lang="hu-HU" dirty="0"/>
-              <a:t>Tárgyak gyűjtése</a:t>
-            </a:r>
+              <a:t>Tárgyak gyűjtése (első boríték, kis boríték, Lakatos aktája, kód, Péteri dossziéja, Főnök bizalma, parlamenti </a:t>
+            </a:r>
+            <a:r>
+              <a:rPr lang="hu-HU"/>
+              <a:t>kulcs)</a:t>
+            </a:r>
+            <a:endParaRPr lang="hu-HU" dirty="0"/>
           </a:p>
         </p:txBody>
       </p:sp>
@@ -6870,11 +6882,7 @@
           <a:p>
             <a:r>
               <a:rPr lang="hu-HU" dirty="0"/>
-              <a:t>Köszönjük </a:t>
-            </a:r>
-            <a:r>
-              <a:rPr lang="hu-HU"/>
-              <a:t>a figyelmet</a:t>
+              <a:t>Köszönjük a figyelmet</a:t>
             </a:r>
           </a:p>
         </p:txBody>
